--- a/docs/ppt/fried-under.pptx
+++ b/docs/ppt/fried-under.pptx
@@ -3718,8 +3718,8 @@
           </p:nvSpPr>
           <p:spPr>
             <a:xfrm>
-              <a:off x="1965441" y="5336204"/>
-              <a:ext cx="62179" cy="80101"/>
+              <a:off x="1785441" y="5336204"/>
+              <a:ext cx="422178" cy="80101"/>
             </a:xfrm>
             <a:prstGeom prst="rect">
               <a:avLst/>
@@ -3751,7 +3751,7 @@
                   <a:latin typeface="Helvetica"/>
                   <a:cs typeface="Helvetica"/>
                 </a:rPr>
-                <a:t>0</a:t>
+                <a:t>Non-frail</a:t>
               </a:r>
             </a:p>
           </p:txBody>
@@ -3810,8 +3810,8 @@
           </p:nvSpPr>
           <p:spPr>
             <a:xfrm>
-              <a:off x="3952689" y="5336204"/>
-              <a:ext cx="62179" cy="80101"/>
+              <a:off x="3788234" y="5336204"/>
+              <a:ext cx="391088" cy="80101"/>
             </a:xfrm>
             <a:prstGeom prst="rect">
               <a:avLst/>
@@ -3843,7 +3843,7 @@
                   <a:latin typeface="Helvetica"/>
                   <a:cs typeface="Helvetica"/>
                 </a:rPr>
-                <a:t>1</a:t>
+                <a:t>Pre-frail</a:t>
               </a:r>
             </a:p>
           </p:txBody>
@@ -3902,8 +3902,8 @@
           </p:nvSpPr>
           <p:spPr>
             <a:xfrm>
-              <a:off x="5939937" y="5336204"/>
-              <a:ext cx="62179" cy="80101"/>
+              <a:off x="5862442" y="5336204"/>
+              <a:ext cx="217170" cy="80101"/>
             </a:xfrm>
             <a:prstGeom prst="rect">
               <a:avLst/>
@@ -3935,7 +3935,7 @@
                   <a:latin typeface="Helvetica"/>
                   <a:cs typeface="Helvetica"/>
                 </a:rPr>
-                <a:t>2</a:t>
+                <a:t>Frail</a:t>
               </a:r>
             </a:p>
           </p:txBody>
@@ -3994,8 +3994,8 @@
           </p:nvSpPr>
           <p:spPr>
             <a:xfrm>
-              <a:off x="3238588" y="5596581"/>
-              <a:ext cx="1490380" cy="100218"/>
+              <a:off x="3459873" y="5596581"/>
+              <a:ext cx="1047810" cy="100218"/>
             </a:xfrm>
             <a:prstGeom prst="rect">
               <a:avLst/>
@@ -4027,7 +4027,7 @@
                   <a:latin typeface="Helvetica"/>
                   <a:cs typeface="Helvetica"/>
                 </a:rPr>
-                <a:t>Fried frailty class (0/1/2)</a:t>
+                <a:t>Fried frailty class</a:t>
               </a:r>
             </a:p>
           </p:txBody>
@@ -6007,8 +6007,8 @@
           </p:nvSpPr>
           <p:spPr>
             <a:xfrm>
-              <a:off x="1965441" y="5336204"/>
-              <a:ext cx="62179" cy="80101"/>
+              <a:off x="1785441" y="5336204"/>
+              <a:ext cx="422178" cy="80101"/>
             </a:xfrm>
             <a:prstGeom prst="rect">
               <a:avLst/>
@@ -6040,7 +6040,7 @@
                   <a:latin typeface="Helvetica"/>
                   <a:cs typeface="Helvetica"/>
                 </a:rPr>
-                <a:t>0</a:t>
+                <a:t>Non-frail</a:t>
               </a:r>
             </a:p>
           </p:txBody>
@@ -6099,8 +6099,8 @@
           </p:nvSpPr>
           <p:spPr>
             <a:xfrm>
-              <a:off x="3952689" y="5336204"/>
-              <a:ext cx="62179" cy="80101"/>
+              <a:off x="3788234" y="5336204"/>
+              <a:ext cx="391088" cy="80101"/>
             </a:xfrm>
             <a:prstGeom prst="rect">
               <a:avLst/>
@@ -6132,7 +6132,7 @@
                   <a:latin typeface="Helvetica"/>
                   <a:cs typeface="Helvetica"/>
                 </a:rPr>
-                <a:t>1</a:t>
+                <a:t>Pre-frail</a:t>
               </a:r>
             </a:p>
           </p:txBody>
@@ -6191,8 +6191,8 @@
           </p:nvSpPr>
           <p:spPr>
             <a:xfrm>
-              <a:off x="5939937" y="5336204"/>
-              <a:ext cx="62179" cy="80101"/>
+              <a:off x="5862442" y="5336204"/>
+              <a:ext cx="217170" cy="80101"/>
             </a:xfrm>
             <a:prstGeom prst="rect">
               <a:avLst/>
@@ -6224,7 +6224,7 @@
                   <a:latin typeface="Helvetica"/>
                   <a:cs typeface="Helvetica"/>
                 </a:rPr>
-                <a:t>2</a:t>
+                <a:t>Frail</a:t>
               </a:r>
             </a:p>
           </p:txBody>
@@ -6283,8 +6283,8 @@
           </p:nvSpPr>
           <p:spPr>
             <a:xfrm>
-              <a:off x="3238588" y="5596581"/>
-              <a:ext cx="1490380" cy="100218"/>
+              <a:off x="3459873" y="5596581"/>
+              <a:ext cx="1047810" cy="100218"/>
             </a:xfrm>
             <a:prstGeom prst="rect">
               <a:avLst/>
@@ -6316,7 +6316,7 @@
                   <a:latin typeface="Helvetica"/>
                   <a:cs typeface="Helvetica"/>
                 </a:rPr>
-                <a:t>Fried frailty class (0/1/2)</a:t>
+                <a:t>Fried frailty class</a:t>
               </a:r>
             </a:p>
           </p:txBody>
@@ -8296,8 +8296,8 @@
           </p:nvSpPr>
           <p:spPr>
             <a:xfrm>
-              <a:off x="1965441" y="5336204"/>
-              <a:ext cx="62179" cy="80101"/>
+              <a:off x="1785441" y="5336204"/>
+              <a:ext cx="422178" cy="80101"/>
             </a:xfrm>
             <a:prstGeom prst="rect">
               <a:avLst/>
@@ -8329,7 +8329,7 @@
                   <a:latin typeface="Helvetica"/>
                   <a:cs typeface="Helvetica"/>
                 </a:rPr>
-                <a:t>0</a:t>
+                <a:t>Non-frail</a:t>
               </a:r>
             </a:p>
           </p:txBody>
@@ -8388,8 +8388,8 @@
           </p:nvSpPr>
           <p:spPr>
             <a:xfrm>
-              <a:off x="3952689" y="5336204"/>
-              <a:ext cx="62179" cy="80101"/>
+              <a:off x="3788234" y="5336204"/>
+              <a:ext cx="391088" cy="80101"/>
             </a:xfrm>
             <a:prstGeom prst="rect">
               <a:avLst/>
@@ -8421,7 +8421,7 @@
                   <a:latin typeface="Helvetica"/>
                   <a:cs typeface="Helvetica"/>
                 </a:rPr>
-                <a:t>1</a:t>
+                <a:t>Pre-frail</a:t>
               </a:r>
             </a:p>
           </p:txBody>
@@ -8480,8 +8480,8 @@
           </p:nvSpPr>
           <p:spPr>
             <a:xfrm>
-              <a:off x="5939937" y="5336204"/>
-              <a:ext cx="62179" cy="80101"/>
+              <a:off x="5862442" y="5336204"/>
+              <a:ext cx="217170" cy="80101"/>
             </a:xfrm>
             <a:prstGeom prst="rect">
               <a:avLst/>
@@ -8513,7 +8513,7 @@
                   <a:latin typeface="Helvetica"/>
                   <a:cs typeface="Helvetica"/>
                 </a:rPr>
-                <a:t>2</a:t>
+                <a:t>Frail</a:t>
               </a:r>
             </a:p>
           </p:txBody>
@@ -8572,8 +8572,8 @@
           </p:nvSpPr>
           <p:spPr>
             <a:xfrm>
-              <a:off x="3238588" y="5596581"/>
-              <a:ext cx="1490380" cy="100218"/>
+              <a:off x="3459873" y="5596581"/>
+              <a:ext cx="1047810" cy="100218"/>
             </a:xfrm>
             <a:prstGeom prst="rect">
               <a:avLst/>
@@ -8605,7 +8605,7 @@
                   <a:latin typeface="Helvetica"/>
                   <a:cs typeface="Helvetica"/>
                 </a:rPr>
-                <a:t>Fried frailty class (0/1/2)</a:t>
+                <a:t>Fried frailty class</a:t>
               </a:r>
             </a:p>
           </p:txBody>
@@ -10585,8 +10585,8 @@
           </p:nvSpPr>
           <p:spPr>
             <a:xfrm>
-              <a:off x="1965441" y="5336204"/>
-              <a:ext cx="62179" cy="80101"/>
+              <a:off x="1785441" y="5336204"/>
+              <a:ext cx="422178" cy="80101"/>
             </a:xfrm>
             <a:prstGeom prst="rect">
               <a:avLst/>
@@ -10618,7 +10618,7 @@
                   <a:latin typeface="Helvetica"/>
                   <a:cs typeface="Helvetica"/>
                 </a:rPr>
-                <a:t>0</a:t>
+                <a:t>Non-frail</a:t>
               </a:r>
             </a:p>
           </p:txBody>
@@ -10677,8 +10677,8 @@
           </p:nvSpPr>
           <p:spPr>
             <a:xfrm>
-              <a:off x="3952689" y="5336204"/>
-              <a:ext cx="62179" cy="80101"/>
+              <a:off x="3788234" y="5336204"/>
+              <a:ext cx="391088" cy="80101"/>
             </a:xfrm>
             <a:prstGeom prst="rect">
               <a:avLst/>
@@ -10710,7 +10710,7 @@
                   <a:latin typeface="Helvetica"/>
                   <a:cs typeface="Helvetica"/>
                 </a:rPr>
-                <a:t>1</a:t>
+                <a:t>Pre-frail</a:t>
               </a:r>
             </a:p>
           </p:txBody>
@@ -10769,8 +10769,8 @@
           </p:nvSpPr>
           <p:spPr>
             <a:xfrm>
-              <a:off x="5939937" y="5336204"/>
-              <a:ext cx="62179" cy="80101"/>
+              <a:off x="5862442" y="5336204"/>
+              <a:ext cx="217170" cy="80101"/>
             </a:xfrm>
             <a:prstGeom prst="rect">
               <a:avLst/>
@@ -10802,7 +10802,7 @@
                   <a:latin typeface="Helvetica"/>
                   <a:cs typeface="Helvetica"/>
                 </a:rPr>
-                <a:t>2</a:t>
+                <a:t>Frail</a:t>
               </a:r>
             </a:p>
           </p:txBody>
@@ -10861,8 +10861,8 @@
           </p:nvSpPr>
           <p:spPr>
             <a:xfrm>
-              <a:off x="3238588" y="5596581"/>
-              <a:ext cx="1490380" cy="100218"/>
+              <a:off x="3459873" y="5596581"/>
+              <a:ext cx="1047810" cy="100218"/>
             </a:xfrm>
             <a:prstGeom prst="rect">
               <a:avLst/>
@@ -10894,7 +10894,7 @@
                   <a:latin typeface="Helvetica"/>
                   <a:cs typeface="Helvetica"/>
                 </a:rPr>
-                <a:t>Fried frailty class (0/1/2)</a:t>
+                <a:t>Fried frailty class</a:t>
               </a:r>
             </a:p>
           </p:txBody>
@@ -12874,8 +12874,8 @@
           </p:nvSpPr>
           <p:spPr>
             <a:xfrm>
-              <a:off x="1965441" y="5336204"/>
-              <a:ext cx="62179" cy="80101"/>
+              <a:off x="1785441" y="5336204"/>
+              <a:ext cx="422178" cy="80101"/>
             </a:xfrm>
             <a:prstGeom prst="rect">
               <a:avLst/>
@@ -12907,7 +12907,7 @@
                   <a:latin typeface="Helvetica"/>
                   <a:cs typeface="Helvetica"/>
                 </a:rPr>
-                <a:t>0</a:t>
+                <a:t>Non-frail</a:t>
               </a:r>
             </a:p>
           </p:txBody>
@@ -12966,8 +12966,8 @@
           </p:nvSpPr>
           <p:spPr>
             <a:xfrm>
-              <a:off x="3952689" y="5336204"/>
-              <a:ext cx="62179" cy="80101"/>
+              <a:off x="3788234" y="5336204"/>
+              <a:ext cx="391088" cy="80101"/>
             </a:xfrm>
             <a:prstGeom prst="rect">
               <a:avLst/>
@@ -12999,7 +12999,7 @@
                   <a:latin typeface="Helvetica"/>
                   <a:cs typeface="Helvetica"/>
                 </a:rPr>
-                <a:t>1</a:t>
+                <a:t>Pre-frail</a:t>
               </a:r>
             </a:p>
           </p:txBody>
@@ -13058,8 +13058,8 @@
           </p:nvSpPr>
           <p:spPr>
             <a:xfrm>
-              <a:off x="5939937" y="5336204"/>
-              <a:ext cx="62179" cy="80101"/>
+              <a:off x="5862442" y="5336204"/>
+              <a:ext cx="217170" cy="80101"/>
             </a:xfrm>
             <a:prstGeom prst="rect">
               <a:avLst/>
@@ -13091,7 +13091,7 @@
                   <a:latin typeface="Helvetica"/>
                   <a:cs typeface="Helvetica"/>
                 </a:rPr>
-                <a:t>2</a:t>
+                <a:t>Frail</a:t>
               </a:r>
             </a:p>
           </p:txBody>
@@ -13150,8 +13150,8 @@
           </p:nvSpPr>
           <p:spPr>
             <a:xfrm>
-              <a:off x="3238588" y="5596581"/>
-              <a:ext cx="1490380" cy="100218"/>
+              <a:off x="3459873" y="5596581"/>
+              <a:ext cx="1047810" cy="100218"/>
             </a:xfrm>
             <a:prstGeom prst="rect">
               <a:avLst/>
@@ -13183,7 +13183,7 @@
                   <a:latin typeface="Helvetica"/>
                   <a:cs typeface="Helvetica"/>
                 </a:rPr>
-                <a:t>Fried frailty class (0/1/2)</a:t>
+                <a:t>Fried frailty class</a:t>
               </a:r>
             </a:p>
           </p:txBody>
@@ -15163,8 +15163,8 @@
           </p:nvSpPr>
           <p:spPr>
             <a:xfrm>
-              <a:off x="1965441" y="5336204"/>
-              <a:ext cx="62179" cy="80101"/>
+              <a:off x="1785441" y="5336204"/>
+              <a:ext cx="422178" cy="80101"/>
             </a:xfrm>
             <a:prstGeom prst="rect">
               <a:avLst/>
@@ -15196,7 +15196,7 @@
                   <a:latin typeface="Helvetica"/>
                   <a:cs typeface="Helvetica"/>
                 </a:rPr>
-                <a:t>0</a:t>
+                <a:t>Non-frail</a:t>
               </a:r>
             </a:p>
           </p:txBody>
@@ -15255,8 +15255,8 @@
           </p:nvSpPr>
           <p:spPr>
             <a:xfrm>
-              <a:off x="3952689" y="5336204"/>
-              <a:ext cx="62179" cy="80101"/>
+              <a:off x="3788234" y="5336204"/>
+              <a:ext cx="391088" cy="80101"/>
             </a:xfrm>
             <a:prstGeom prst="rect">
               <a:avLst/>
@@ -15288,7 +15288,7 @@
                   <a:latin typeface="Helvetica"/>
                   <a:cs typeface="Helvetica"/>
                 </a:rPr>
-                <a:t>1</a:t>
+                <a:t>Pre-frail</a:t>
               </a:r>
             </a:p>
           </p:txBody>
@@ -15347,8 +15347,8 @@
           </p:nvSpPr>
           <p:spPr>
             <a:xfrm>
-              <a:off x="5939937" y="5336204"/>
-              <a:ext cx="62179" cy="80101"/>
+              <a:off x="5862442" y="5336204"/>
+              <a:ext cx="217170" cy="80101"/>
             </a:xfrm>
             <a:prstGeom prst="rect">
               <a:avLst/>
@@ -15380,7 +15380,7 @@
                   <a:latin typeface="Helvetica"/>
                   <a:cs typeface="Helvetica"/>
                 </a:rPr>
-                <a:t>2</a:t>
+                <a:t>Frail</a:t>
               </a:r>
             </a:p>
           </p:txBody>
@@ -15439,8 +15439,8 @@
           </p:nvSpPr>
           <p:spPr>
             <a:xfrm>
-              <a:off x="3238588" y="5596581"/>
-              <a:ext cx="1490380" cy="100218"/>
+              <a:off x="3459873" y="5596581"/>
+              <a:ext cx="1047810" cy="100218"/>
             </a:xfrm>
             <a:prstGeom prst="rect">
               <a:avLst/>
@@ -15472,7 +15472,7 @@
                   <a:latin typeface="Helvetica"/>
                   <a:cs typeface="Helvetica"/>
                 </a:rPr>
-                <a:t>Fried frailty class (0/1/2)</a:t>
+                <a:t>Fried frailty class</a:t>
               </a:r>
             </a:p>
           </p:txBody>
@@ -17452,8 +17452,8 @@
           </p:nvSpPr>
           <p:spPr>
             <a:xfrm>
-              <a:off x="1965441" y="5336204"/>
-              <a:ext cx="62179" cy="80101"/>
+              <a:off x="1785441" y="5336204"/>
+              <a:ext cx="422178" cy="80101"/>
             </a:xfrm>
             <a:prstGeom prst="rect">
               <a:avLst/>
@@ -17485,7 +17485,7 @@
                   <a:latin typeface="Helvetica"/>
                   <a:cs typeface="Helvetica"/>
                 </a:rPr>
-                <a:t>0</a:t>
+                <a:t>Non-frail</a:t>
               </a:r>
             </a:p>
           </p:txBody>
@@ -17544,8 +17544,8 @@
           </p:nvSpPr>
           <p:spPr>
             <a:xfrm>
-              <a:off x="3952689" y="5336204"/>
-              <a:ext cx="62179" cy="80101"/>
+              <a:off x="3788234" y="5336204"/>
+              <a:ext cx="391088" cy="80101"/>
             </a:xfrm>
             <a:prstGeom prst="rect">
               <a:avLst/>
@@ -17577,7 +17577,7 @@
                   <a:latin typeface="Helvetica"/>
                   <a:cs typeface="Helvetica"/>
                 </a:rPr>
-                <a:t>1</a:t>
+                <a:t>Pre-frail</a:t>
               </a:r>
             </a:p>
           </p:txBody>
@@ -17636,8 +17636,8 @@
           </p:nvSpPr>
           <p:spPr>
             <a:xfrm>
-              <a:off x="5939937" y="5336204"/>
-              <a:ext cx="62179" cy="80101"/>
+              <a:off x="5862442" y="5336204"/>
+              <a:ext cx="217170" cy="80101"/>
             </a:xfrm>
             <a:prstGeom prst="rect">
               <a:avLst/>
@@ -17669,7 +17669,7 @@
                   <a:latin typeface="Helvetica"/>
                   <a:cs typeface="Helvetica"/>
                 </a:rPr>
-                <a:t>2</a:t>
+                <a:t>Frail</a:t>
               </a:r>
             </a:p>
           </p:txBody>
@@ -17728,8 +17728,8 @@
           </p:nvSpPr>
           <p:spPr>
             <a:xfrm>
-              <a:off x="3238588" y="5596581"/>
-              <a:ext cx="1490380" cy="100218"/>
+              <a:off x="3459873" y="5596581"/>
+              <a:ext cx="1047810" cy="100218"/>
             </a:xfrm>
             <a:prstGeom prst="rect">
               <a:avLst/>
@@ -17761,7 +17761,7 @@
                   <a:latin typeface="Helvetica"/>
                   <a:cs typeface="Helvetica"/>
                 </a:rPr>
-                <a:t>Fried frailty class (0/1/2)</a:t>
+                <a:t>Fried frailty class</a:t>
               </a:r>
             </a:p>
           </p:txBody>
@@ -19741,8 +19741,8 @@
           </p:nvSpPr>
           <p:spPr>
             <a:xfrm>
-              <a:off x="1965441" y="5336204"/>
-              <a:ext cx="62179" cy="80101"/>
+              <a:off x="1785441" y="5336204"/>
+              <a:ext cx="422178" cy="80101"/>
             </a:xfrm>
             <a:prstGeom prst="rect">
               <a:avLst/>
@@ -19774,7 +19774,7 @@
                   <a:latin typeface="Helvetica"/>
                   <a:cs typeface="Helvetica"/>
                 </a:rPr>
-                <a:t>0</a:t>
+                <a:t>Non-frail</a:t>
               </a:r>
             </a:p>
           </p:txBody>
@@ -19833,8 +19833,8 @@
           </p:nvSpPr>
           <p:spPr>
             <a:xfrm>
-              <a:off x="3952689" y="5336204"/>
-              <a:ext cx="62179" cy="80101"/>
+              <a:off x="3788234" y="5336204"/>
+              <a:ext cx="391088" cy="80101"/>
             </a:xfrm>
             <a:prstGeom prst="rect">
               <a:avLst/>
@@ -19866,7 +19866,7 @@
                   <a:latin typeface="Helvetica"/>
                   <a:cs typeface="Helvetica"/>
                 </a:rPr>
-                <a:t>1</a:t>
+                <a:t>Pre-frail</a:t>
               </a:r>
             </a:p>
           </p:txBody>
@@ -19925,8 +19925,8 @@
           </p:nvSpPr>
           <p:spPr>
             <a:xfrm>
-              <a:off x="5939937" y="5336204"/>
-              <a:ext cx="62179" cy="80101"/>
+              <a:off x="5862442" y="5336204"/>
+              <a:ext cx="217170" cy="80101"/>
             </a:xfrm>
             <a:prstGeom prst="rect">
               <a:avLst/>
@@ -19958,7 +19958,7 @@
                   <a:latin typeface="Helvetica"/>
                   <a:cs typeface="Helvetica"/>
                 </a:rPr>
-                <a:t>2</a:t>
+                <a:t>Frail</a:t>
               </a:r>
             </a:p>
           </p:txBody>
@@ -20017,8 +20017,8 @@
           </p:nvSpPr>
           <p:spPr>
             <a:xfrm>
-              <a:off x="3238588" y="5596581"/>
-              <a:ext cx="1490380" cy="100218"/>
+              <a:off x="3459873" y="5596581"/>
+              <a:ext cx="1047810" cy="100218"/>
             </a:xfrm>
             <a:prstGeom prst="rect">
               <a:avLst/>
@@ -20050,7 +20050,7 @@
                   <a:latin typeface="Helvetica"/>
                   <a:cs typeface="Helvetica"/>
                 </a:rPr>
-                <a:t>Fried frailty class (0/1/2)</a:t>
+                <a:t>Fried frailty class</a:t>
               </a:r>
             </a:p>
           </p:txBody>
